--- a/slides/Lecture_11_WrappingUp.pptx
+++ b/slides/Lecture_11_WrappingUp.pptx
@@ -205,7 +205,7 @@
           <a:p>
             <a:fld id="{92C08CDA-29C6-4C4F-9345-278F31C990CA}" type="datetimeFigureOut">
               <a:rPr lang="en-GB" smtClean="0"/>
-              <a:t>12/09/2024</a:t>
+              <a:t>04/09/2026</a:t>
             </a:fld>
             <a:endParaRPr lang="en-GB"/>
           </a:p>
@@ -2904,7 +2904,38 @@
                 <a:ea typeface="Open Sans" panose="020B0606030504020204" pitchFamily="34" charset="0"/>
                 <a:cs typeface="Open Sans" panose="020B0606030504020204" pitchFamily="34" charset="0"/>
               </a:rPr>
-              <a:t>Nicholas Davies, PhD </a:t>
+              <a:t>Katie Atkins </a:t>
+            </a:r>
+            <a:r>
+              <a:rPr lang="en-GB" sz="2000" dirty="0">
+                <a:latin typeface="Open Sans" panose="020B0606030504020204" pitchFamily="34" charset="0"/>
+                <a:ea typeface="Open Sans" panose="020B0606030504020204" pitchFamily="34" charset="0"/>
+                <a:cs typeface="Open Sans" panose="020B0606030504020204" pitchFamily="34" charset="0"/>
+                <a:hlinkClick r:id="rId2"/>
+              </a:rPr>
+              <a:t>Katherine.Atkins@lshtm.ac.uk</a:t>
+            </a:r>
+            <a:r>
+              <a:rPr lang="en-GB" sz="2000" dirty="0">
+                <a:latin typeface="Open Sans" panose="020B0606030504020204" pitchFamily="34" charset="0"/>
+                <a:ea typeface="Open Sans" panose="020B0606030504020204" pitchFamily="34" charset="0"/>
+                <a:cs typeface="Open Sans" panose="020B0606030504020204" pitchFamily="34" charset="0"/>
+              </a:rPr>
+              <a:t>  </a:t>
+            </a:r>
+          </a:p>
+          <a:p>
+            <a:pPr marL="285750" indent="-285750">
+              <a:buFont typeface="Arial" panose="020B0604020202020204" pitchFamily="34" charset="0"/>
+              <a:buChar char="•"/>
+            </a:pPr>
+            <a:r>
+              <a:rPr lang="en-GB" sz="2000" dirty="0">
+                <a:latin typeface="Open Sans" panose="020B0606030504020204" pitchFamily="34" charset="0"/>
+                <a:ea typeface="Open Sans" panose="020B0606030504020204" pitchFamily="34" charset="0"/>
+                <a:cs typeface="Open Sans" panose="020B0606030504020204" pitchFamily="34" charset="0"/>
+              </a:rPr>
+              <a:t>Nicholas Davies </a:t>
             </a:r>
             <a:r>
               <a:rPr lang="en-GB" sz="2000" b="0" i="0" dirty="0">
@@ -2915,7 +2946,7 @@
                 <a:latin typeface="Open Sans" panose="020B0606030504020204" pitchFamily="34" charset="0"/>
                 <a:ea typeface="Open Sans" panose="020B0606030504020204" pitchFamily="34" charset="0"/>
                 <a:cs typeface="Open Sans" panose="020B0606030504020204" pitchFamily="34" charset="0"/>
-                <a:hlinkClick r:id="rId2"/>
+                <a:hlinkClick r:id="rId3"/>
               </a:rPr>
               <a:t>Nicholas.Davies@lshtm.ac.uk</a:t>
             </a:r>
@@ -2940,7 +2971,7 @@
                 <a:ea typeface="Open Sans" panose="020B0606030504020204" pitchFamily="34" charset="0"/>
                 <a:cs typeface="Open Sans" panose="020B0606030504020204" pitchFamily="34" charset="0"/>
               </a:rPr>
-              <a:t>Yang Liu, PhD </a:t>
+              <a:t>Roz Eggo</a:t>
             </a:r>
             <a:r>
               <a:rPr lang="en-GB" sz="2000" dirty="0">
@@ -2950,14 +2981,37 @@
                 <a:latin typeface="Open Sans" panose="020B0606030504020204" pitchFamily="34" charset="0"/>
                 <a:ea typeface="Open Sans" panose="020B0606030504020204" pitchFamily="34" charset="0"/>
                 <a:cs typeface="Open Sans" panose="020B0606030504020204" pitchFamily="34" charset="0"/>
-                <a:hlinkClick r:id="rId3"/>
               </a:rPr>
-              <a:t>Yang.Liu@lshtm.ac.uk</a:t>
-            </a:r>
-            <a:endParaRPr lang="en-GB" sz="2000" dirty="0">
+              <a:t> </a:t>
+            </a:r>
+            <a:r>
+              <a:rPr lang="en-GB" sz="2000" dirty="0">
+                <a:solidFill>
+                  <a:srgbClr val="605E5C"/>
+                </a:solidFill>
+                <a:latin typeface="Open Sans" panose="020B0606030504020204" pitchFamily="34" charset="0"/>
+                <a:ea typeface="Open Sans" panose="020B0606030504020204" pitchFamily="34" charset="0"/>
+                <a:cs typeface="Open Sans" panose="020B0606030504020204" pitchFamily="34" charset="0"/>
+                <a:hlinkClick r:id="rId4"/>
+              </a:rPr>
+              <a:t>R.Eggo@lshtm.ac.uk</a:t>
+            </a:r>
+            <a:r>
+              <a:rPr lang="en-GB" sz="2000" dirty="0">
+                <a:solidFill>
+                  <a:srgbClr val="605E5C"/>
+                </a:solidFill>
+                <a:latin typeface="Open Sans" panose="020B0606030504020204" pitchFamily="34" charset="0"/>
+                <a:ea typeface="Open Sans" panose="020B0606030504020204" pitchFamily="34" charset="0"/>
+                <a:cs typeface="Open Sans" panose="020B0606030504020204" pitchFamily="34" charset="0"/>
+              </a:rPr>
+              <a:t> </a:t>
+            </a:r>
+            <a:endParaRPr lang="en-GB" sz="2000" b="0" i="0" dirty="0">
               <a:solidFill>
                 <a:srgbClr val="605E5C"/>
               </a:solidFill>
+              <a:effectLst/>
               <a:latin typeface="Open Sans" panose="020B0606030504020204" pitchFamily="34" charset="0"/>
               <a:ea typeface="Open Sans" panose="020B0606030504020204" pitchFamily="34" charset="0"/>
               <a:cs typeface="Open Sans" panose="020B0606030504020204" pitchFamily="34" charset="0"/>
@@ -2974,16 +3028,69 @@
                 <a:ea typeface="Open Sans" panose="020B0606030504020204" pitchFamily="34" charset="0"/>
                 <a:cs typeface="Open Sans" panose="020B0606030504020204" pitchFamily="34" charset="0"/>
               </a:rPr>
-              <a:t>Oli Brady, PhD </a:t>
-            </a:r>
+              <a:t>Kaitlyn Johnson </a:t>
+            </a:r>
+            <a:r>
+              <a:rPr lang="en-GB" sz="2000" dirty="0">
+                <a:solidFill>
+                  <a:srgbClr val="605E5C"/>
+                </a:solidFill>
+                <a:latin typeface="Open Sans" panose="020B0606030504020204" pitchFamily="34" charset="0"/>
+                <a:ea typeface="Open Sans" panose="020B0606030504020204" pitchFamily="34" charset="0"/>
+                <a:cs typeface="Open Sans" panose="020B0606030504020204" pitchFamily="34" charset="0"/>
+                <a:hlinkClick r:id="rId5"/>
+              </a:rPr>
+              <a:t>Kaitlyn.Johnson@lshtm.ac.uk</a:t>
+            </a:r>
+            <a:r>
+              <a:rPr lang="en-GB" sz="2000" dirty="0">
+                <a:solidFill>
+                  <a:srgbClr val="605E5C"/>
+                </a:solidFill>
+                <a:latin typeface="Open Sans" panose="020B0606030504020204" pitchFamily="34" charset="0"/>
+                <a:ea typeface="Open Sans" panose="020B0606030504020204" pitchFamily="34" charset="0"/>
+                <a:cs typeface="Open Sans" panose="020B0606030504020204" pitchFamily="34" charset="0"/>
+              </a:rPr>
+              <a:t> </a:t>
+            </a:r>
+          </a:p>
+          <a:p>
+            <a:endParaRPr lang="en-GB" sz="2000" b="1" dirty="0">
+              <a:latin typeface="Open Sans" panose="020B0606030504020204" pitchFamily="34" charset="0"/>
+              <a:ea typeface="Open Sans" panose="020B0606030504020204" pitchFamily="34" charset="0"/>
+              <a:cs typeface="Open Sans" panose="020B0606030504020204" pitchFamily="34" charset="0"/>
+            </a:endParaRPr>
+          </a:p>
+          <a:p>
+            <a:r>
+              <a:rPr lang="en-GB" sz="2000" b="1" dirty="0">
+                <a:latin typeface="Open Sans" panose="020B0606030504020204" pitchFamily="34" charset="0"/>
+                <a:ea typeface="Open Sans" panose="020B0606030504020204" pitchFamily="34" charset="0"/>
+                <a:cs typeface="Open Sans" panose="020B0606030504020204" pitchFamily="34" charset="0"/>
+              </a:rPr>
+              <a:t>Course administration</a:t>
+            </a:r>
+          </a:p>
+          <a:p>
+            <a:pPr marL="285750" indent="-285750">
+              <a:buFont typeface="Arial" panose="020B0604020202020204" pitchFamily="34" charset="0"/>
+              <a:buChar char="•"/>
+            </a:pPr>
             <a:r>
               <a:rPr lang="en-GB" sz="2000" dirty="0">
                 <a:latin typeface="Open Sans" panose="020B0606030504020204" pitchFamily="34" charset="0"/>
                 <a:ea typeface="Open Sans" panose="020B0606030504020204" pitchFamily="34" charset="0"/>
                 <a:cs typeface="Open Sans" panose="020B0606030504020204" pitchFamily="34" charset="0"/>
-                <a:hlinkClick r:id="rId4"/>
               </a:rPr>
-              <a:t>Oliver.Brady@lshtm.ac.uk</a:t>
+              <a:t>Francesco </a:t>
+            </a:r>
+            <a:r>
+              <a:rPr lang="en-GB" sz="2000" dirty="0" err="1">
+                <a:latin typeface="Open Sans" panose="020B0606030504020204" pitchFamily="34" charset="0"/>
+                <a:ea typeface="Open Sans" panose="020B0606030504020204" pitchFamily="34" charset="0"/>
+                <a:cs typeface="Open Sans" panose="020B0606030504020204" pitchFamily="34" charset="0"/>
+              </a:rPr>
+              <a:t>Grisolia</a:t>
             </a:r>
             <a:r>
               <a:rPr lang="en-GB" sz="2000" dirty="0">
@@ -2993,59 +3100,12 @@
               </a:rPr>
               <a:t> </a:t>
             </a:r>
-          </a:p>
-          <a:p>
-            <a:endParaRPr lang="en-GB" sz="2000" b="1" dirty="0">
-              <a:latin typeface="Open Sans" panose="020B0606030504020204" pitchFamily="34" charset="0"/>
-              <a:ea typeface="Open Sans" panose="020B0606030504020204" pitchFamily="34" charset="0"/>
-              <a:cs typeface="Open Sans" panose="020B0606030504020204" pitchFamily="34" charset="0"/>
-            </a:endParaRPr>
-          </a:p>
-          <a:p>
-            <a:r>
-              <a:rPr lang="en-GB" sz="2000" b="1" dirty="0">
-                <a:latin typeface="Open Sans" panose="020B0606030504020204" pitchFamily="34" charset="0"/>
-                <a:ea typeface="Open Sans" panose="020B0606030504020204" pitchFamily="34" charset="0"/>
-                <a:cs typeface="Open Sans" panose="020B0606030504020204" pitchFamily="34" charset="0"/>
-              </a:rPr>
-              <a:t>Course administration</a:t>
-            </a:r>
-          </a:p>
-          <a:p>
-            <a:pPr marL="285750" indent="-285750">
-              <a:buFont typeface="Arial" panose="020B0604020202020204" pitchFamily="34" charset="0"/>
-              <a:buChar char="•"/>
-            </a:pPr>
             <a:r>
               <a:rPr lang="en-GB" sz="2000" dirty="0">
                 <a:latin typeface="Open Sans" panose="020B0606030504020204" pitchFamily="34" charset="0"/>
                 <a:ea typeface="Open Sans" panose="020B0606030504020204" pitchFamily="34" charset="0"/>
                 <a:cs typeface="Open Sans" panose="020B0606030504020204" pitchFamily="34" charset="0"/>
-              </a:rPr>
-              <a:t>Francesco </a:t>
-            </a:r>
-            <a:r>
-              <a:rPr lang="en-GB" sz="2000" dirty="0" err="1">
-                <a:latin typeface="Open Sans" panose="020B0606030504020204" pitchFamily="34" charset="0"/>
-                <a:ea typeface="Open Sans" panose="020B0606030504020204" pitchFamily="34" charset="0"/>
-                <a:cs typeface="Open Sans" panose="020B0606030504020204" pitchFamily="34" charset="0"/>
-              </a:rPr>
-              <a:t>Grisolia</a:t>
-            </a:r>
-            <a:r>
-              <a:rPr lang="en-GB" sz="2000" dirty="0">
-                <a:latin typeface="Open Sans" panose="020B0606030504020204" pitchFamily="34" charset="0"/>
-                <a:ea typeface="Open Sans" panose="020B0606030504020204" pitchFamily="34" charset="0"/>
-                <a:cs typeface="Open Sans" panose="020B0606030504020204" pitchFamily="34" charset="0"/>
-              </a:rPr>
-              <a:t> </a:t>
-            </a:r>
-            <a:r>
-              <a:rPr lang="en-GB" sz="2000" dirty="0">
-                <a:latin typeface="Open Sans" panose="020B0606030504020204" pitchFamily="34" charset="0"/>
-                <a:ea typeface="Open Sans" panose="020B0606030504020204" pitchFamily="34" charset="0"/>
-                <a:cs typeface="Open Sans" panose="020B0606030504020204" pitchFamily="34" charset="0"/>
-                <a:hlinkClick r:id="rId5"/>
+                <a:hlinkClick r:id="rId6"/>
               </a:rPr>
               <a:t>Francesco.Grisolia@lshtm.ac.uk</a:t>
             </a:r>
@@ -3083,39 +3143,7 @@
                 <a:ea typeface="Open Sans" panose="020B0606030504020204" pitchFamily="34" charset="0"/>
                 <a:cs typeface="Open Sans" panose="020B0606030504020204" pitchFamily="34" charset="0"/>
               </a:rPr>
-              <a:t>Billy </a:t>
-            </a:r>
-            <a:r>
-              <a:rPr lang="en-GB" sz="2000" dirty="0" err="1">
-                <a:latin typeface="Open Sans" panose="020B0606030504020204" pitchFamily="34" charset="0"/>
-                <a:ea typeface="Open Sans" panose="020B0606030504020204" pitchFamily="34" charset="0"/>
-                <a:cs typeface="Open Sans" panose="020B0606030504020204" pitchFamily="34" charset="0"/>
-              </a:rPr>
-              <a:t>Quilty</a:t>
-            </a:r>
-            <a:r>
-              <a:rPr lang="en-GB" sz="2000" dirty="0">
-                <a:latin typeface="Open Sans" panose="020B0606030504020204" pitchFamily="34" charset="0"/>
-                <a:ea typeface="Open Sans" panose="020B0606030504020204" pitchFamily="34" charset="0"/>
-                <a:cs typeface="Open Sans" panose="020B0606030504020204" pitchFamily="34" charset="0"/>
-              </a:rPr>
-              <a:t>, Kath O’Reilly, Seb Funk, Johnny Filipe, Alexis Robert, Alex Richards, </a:t>
-            </a:r>
-            <a:r>
-              <a:rPr lang="en-GB" sz="2000" dirty="0" err="1">
-                <a:latin typeface="Open Sans" panose="020B0606030504020204" pitchFamily="34" charset="0"/>
-                <a:ea typeface="Open Sans" panose="020B0606030504020204" pitchFamily="34" charset="0"/>
-                <a:cs typeface="Open Sans" panose="020B0606030504020204" pitchFamily="34" charset="0"/>
-              </a:rPr>
-              <a:t>Kaja</a:t>
-            </a:r>
-            <a:r>
-              <a:rPr lang="en-GB" sz="2000" dirty="0">
-                <a:latin typeface="Open Sans" panose="020B0606030504020204" pitchFamily="34" charset="0"/>
-                <a:ea typeface="Open Sans" panose="020B0606030504020204" pitchFamily="34" charset="0"/>
-                <a:cs typeface="Open Sans" panose="020B0606030504020204" pitchFamily="34" charset="0"/>
-              </a:rPr>
-              <a:t> Abbas (All LSHTM / CMMID-based)</a:t>
+              <a:t>Kaja Abbas, Sam Abbott, Alexis Robert (All LSHTM / CMMID-based)</a:t>
             </a:r>
           </a:p>
         </p:txBody>
@@ -3668,7 +3696,7 @@
                   <a:srgbClr val="FF0000"/>
                 </a:solidFill>
               </a:rPr>
-              <a:t>Feb 2025</a:t>
+              <a:t>Sep 2026</a:t>
             </a:r>
           </a:p>
         </p:txBody>
